--- a/Documentos_varios/Manual de Usuario FlowLog.pptx
+++ b/Documentos_varios/Manual de Usuario FlowLog.pptx
@@ -5316,7 +5316,7 @@
         </p:blipFill>
         <p:spPr bwMode="auto">
           <a:xfrm>
-            <a:off x="44625" y="323528"/>
+            <a:off x="83708" y="323528"/>
             <a:ext cx="6774292" cy="7565057"/>
           </a:xfrm>
           <a:prstGeom prst="rect">
